--- a/core/resources/presentation/presentation_template.pptx
+++ b/core/resources/presentation/presentation_template.pptx
@@ -9,7 +9,7 @@
     <p:sldId id="257" r:id="rId3"/>
     <p:sldId id="270" r:id="rId4"/>
     <p:sldId id="259" r:id="rId5"/>
-    <p:sldId id="272" r:id="rId6"/>
+    <p:sldId id="276" r:id="rId6"/>
     <p:sldId id="273" r:id="rId7"/>
     <p:sldId id="274" r:id="rId8"/>
     <p:sldId id="271" r:id="rId9"/>
@@ -703,7 +703,7 @@
           <a:p>
             <a:fld id="{47E6CBC9-41C6-4120-A737-123E6446988E}" type="datetimeFigureOut">
               <a:rPr lang="en-US" smtClean="0"/>
-              <a:t>19-Feb-24</a:t>
+              <a:t>11-Jul-24</a:t>
             </a:fld>
             <a:endParaRPr lang="en-US"/>
           </a:p>
@@ -913,7 +913,7 @@
           <a:p>
             <a:fld id="{47E6CBC9-41C6-4120-A737-123E6446988E}" type="datetimeFigureOut">
               <a:rPr lang="en-US" smtClean="0"/>
-              <a:t>19-Feb-24</a:t>
+              <a:t>11-Jul-24</a:t>
             </a:fld>
             <a:endParaRPr lang="en-US"/>
           </a:p>
@@ -2964,75 +2964,6 @@
       </p:sp>
       <p:sp>
         <p:nvSpPr>
-          <p:cNvPr id="24" name="Espaço Reservado para Imagem 18">
-            <a:extLst>
-              <a:ext uri="{FF2B5EF4-FFF2-40B4-BE49-F238E27FC236}">
-                <a16:creationId xmlns:a16="http://schemas.microsoft.com/office/drawing/2014/main" id="{941FACCB-19AE-BD36-9DED-D59C68F1217E}"/>
-              </a:ext>
-            </a:extLst>
-          </p:cNvPr>
-          <p:cNvSpPr>
-            <a:spLocks noGrp="1"/>
-          </p:cNvSpPr>
-          <p:nvPr>
-            <p:ph type="pic" sz="quarter" idx="15" hasCustomPrompt="1"/>
-          </p:nvPr>
-        </p:nvSpPr>
-        <p:spPr>
-          <a:xfrm>
-            <a:off x="8193024" y="3776472"/>
-            <a:ext cx="3803904" cy="2852928"/>
-          </a:xfrm>
-          <a:solidFill>
-            <a:schemeClr val="bg2">
-              <a:lumMod val="90000"/>
-            </a:schemeClr>
-          </a:solidFill>
-        </p:spPr>
-        <p:txBody>
-          <a:bodyPr anchor="ctr">
-            <a:normAutofit/>
-          </a:bodyPr>
-          <a:lstStyle>
-            <a:lvl1pPr marL="457200" indent="-457200" algn="ctr">
-              <a:buNone/>
-              <a:defRPr lang="en-US" sz="2800" kern="1200" dirty="0" smtClean="0">
-                <a:solidFill>
-                  <a:schemeClr val="bg1"/>
-                </a:solidFill>
-                <a:latin typeface="+mj-lt"/>
-                <a:ea typeface="+mn-ea"/>
-                <a:cs typeface="+mn-cs"/>
-              </a:defRPr>
-            </a:lvl1pPr>
-          </a:lstStyle>
-          <a:p>
-            <a:pPr marL="228600" marR="0" lvl="0" indent="-228600" algn="l" defTabSz="914400" rtl="0" eaLnBrk="1" fontAlgn="auto" latinLnBrk="0" hangingPunct="1">
-              <a:lnSpc>
-                <a:spcPct val="90000"/>
-              </a:lnSpc>
-              <a:spcBef>
-                <a:spcPts val="1000"/>
-              </a:spcBef>
-              <a:spcAft>
-                <a:spcPts val="0"/>
-              </a:spcAft>
-              <a:buClrTx/>
-              <a:buSzTx/>
-              <a:buFont typeface="Arial" panose="020B0604020202020204" pitchFamily="34" charset="0"/>
-              <a:buChar char="•"/>
-              <a:tabLst/>
-              <a:defRPr/>
-            </a:pPr>
-            <a:r>
-              <a:rPr lang="en-US" dirty="0"/>
-              <a:t>T2 HISTOGRAM</a:t>
-            </a:r>
-          </a:p>
-        </p:txBody>
-      </p:sp>
-      <p:sp>
-        <p:nvSpPr>
           <p:cNvPr id="4" name="Espaço Reservado para Texto 3">
             <a:extLst>
               <a:ext uri="{FF2B5EF4-FFF2-40B4-BE49-F238E27FC236}">
@@ -3303,6 +3234,60 @@
             <a:r>
               <a:rPr lang="pt-BR" dirty="0"/>
               <a:t>T2</a:t>
+            </a:r>
+            <a:endParaRPr lang="en-US" dirty="0"/>
+          </a:p>
+        </p:txBody>
+      </p:sp>
+      <p:sp>
+        <p:nvSpPr>
+          <p:cNvPr id="3" name="Espaço Reservado para Imagem 2">
+            <a:extLst>
+              <a:ext uri="{FF2B5EF4-FFF2-40B4-BE49-F238E27FC236}">
+                <a16:creationId xmlns:a16="http://schemas.microsoft.com/office/drawing/2014/main" id="{9162B3E2-CFBB-B2EA-BD2B-1B16713E6269}"/>
+              </a:ext>
+            </a:extLst>
+          </p:cNvPr>
+          <p:cNvSpPr>
+            <a:spLocks noGrp="1"/>
+          </p:cNvSpPr>
+          <p:nvPr>
+            <p:ph type="pic" sz="quarter" idx="20" hasCustomPrompt="1"/>
+          </p:nvPr>
+        </p:nvSpPr>
+        <p:spPr>
+          <a:xfrm>
+            <a:off x="8140700" y="3776663"/>
+            <a:ext cx="3949700" cy="2852737"/>
+          </a:xfrm>
+        </p:spPr>
+        <p:txBody>
+          <a:bodyPr>
+            <a:normAutofit/>
+          </a:bodyPr>
+          <a:lstStyle>
+            <a:lvl1pPr>
+              <a:defRPr lang="en-US" sz="2800" kern="1200" dirty="0">
+                <a:solidFill>
+                  <a:schemeClr val="bg1"/>
+                </a:solidFill>
+                <a:latin typeface="+mj-lt"/>
+                <a:ea typeface="+mn-ea"/>
+                <a:cs typeface="+mn-cs"/>
+              </a:defRPr>
+            </a:lvl1pPr>
+          </a:lstStyle>
+          <a:p>
+            <a:r>
+              <a:rPr lang="en-US" sz="2800" kern="1200" dirty="0">
+                <a:solidFill>
+                  <a:schemeClr val="bg1"/>
+                </a:solidFill>
+                <a:latin typeface="+mj-lt"/>
+                <a:ea typeface="+mn-ea"/>
+                <a:cs typeface="+mn-cs"/>
+              </a:rPr>
+              <a:t>T2 HISTOGRAM</a:t>
             </a:r>
             <a:endParaRPr lang="en-US" dirty="0"/>
           </a:p>
@@ -4474,7 +4459,7 @@
           <a:p>
             <a:fld id="{47E6CBC9-41C6-4120-A737-123E6446988E}" type="datetimeFigureOut">
               <a:rPr lang="en-US" smtClean="0"/>
-              <a:t>19-Feb-24</a:t>
+              <a:t>11-Jul-24</a:t>
             </a:fld>
             <a:endParaRPr lang="en-US"/>
           </a:p>
@@ -4763,7 +4748,7 @@
           <a:p>
             <a:fld id="{47E6CBC9-41C6-4120-A737-123E6446988E}" type="datetimeFigureOut">
               <a:rPr lang="en-US" smtClean="0"/>
-              <a:t>19-Feb-24</a:t>
+              <a:t>11-Jul-24</a:t>
             </a:fld>
             <a:endParaRPr lang="en-US"/>
           </a:p>
@@ -5006,7 +4991,7 @@
           <a:p>
             <a:fld id="{47E6CBC9-41C6-4120-A737-123E6446988E}" type="datetimeFigureOut">
               <a:rPr lang="en-US" smtClean="0"/>
-              <a:t>19-Feb-24</a:t>
+              <a:t>11-Jul-24</a:t>
             </a:fld>
             <a:endParaRPr lang="en-US"/>
           </a:p>
@@ -5542,6 +5527,13 @@
           </p:nvPr>
         </p:nvSpPr>
         <p:spPr/>
+        <p:txBody>
+          <a:bodyPr/>
+          <a:lstStyle/>
+          <a:p>
+            <a:endParaRPr lang="en-US"/>
+          </a:p>
+        </p:txBody>
       </p:sp>
       <p:sp>
         <p:nvSpPr>
@@ -5560,6 +5552,13 @@
           </p:nvPr>
         </p:nvSpPr>
         <p:spPr/>
+        <p:txBody>
+          <a:bodyPr/>
+          <a:lstStyle/>
+          <a:p>
+            <a:endParaRPr lang="en-US"/>
+          </a:p>
+        </p:txBody>
       </p:sp>
       <p:sp>
         <p:nvSpPr>
@@ -5578,6 +5577,13 @@
           </p:nvPr>
         </p:nvSpPr>
         <p:spPr/>
+        <p:txBody>
+          <a:bodyPr/>
+          <a:lstStyle/>
+          <a:p>
+            <a:endParaRPr lang="en-US"/>
+          </a:p>
+        </p:txBody>
       </p:sp>
     </p:spTree>
     <p:extLst>
@@ -5655,6 +5661,13 @@
           </p:nvPr>
         </p:nvSpPr>
         <p:spPr/>
+        <p:txBody>
+          <a:bodyPr/>
+          <a:lstStyle/>
+          <a:p>
+            <a:endParaRPr lang="en-US"/>
+          </a:p>
+        </p:txBody>
       </p:sp>
       <p:sp>
         <p:nvSpPr>
@@ -5673,6 +5686,13 @@
           </p:nvPr>
         </p:nvSpPr>
         <p:spPr/>
+        <p:txBody>
+          <a:bodyPr/>
+          <a:lstStyle/>
+          <a:p>
+            <a:endParaRPr lang="en-US"/>
+          </a:p>
+        </p:txBody>
       </p:sp>
       <p:sp>
         <p:nvSpPr>
@@ -5691,6 +5711,13 @@
           </p:nvPr>
         </p:nvSpPr>
         <p:spPr/>
+        <p:txBody>
+          <a:bodyPr/>
+          <a:lstStyle/>
+          <a:p>
+            <a:endParaRPr lang="en-US"/>
+          </a:p>
+        </p:txBody>
       </p:sp>
       <p:sp>
         <p:nvSpPr>
@@ -5823,7 +5850,7 @@
           <p:cNvPr id="2" name="Espaço Reservado para Imagem 1">
             <a:extLst>
               <a:ext uri="{FF2B5EF4-FFF2-40B4-BE49-F238E27FC236}">
-                <a16:creationId xmlns:a16="http://schemas.microsoft.com/office/drawing/2014/main" id="{3E39C184-ABC9-6973-A2DA-F8E43DCA6901}"/>
+                <a16:creationId xmlns:a16="http://schemas.microsoft.com/office/drawing/2014/main" id="{F82C3EE8-FEBB-FB5C-AB43-25979255174B}"/>
               </a:ext>
             </a:extLst>
           </p:cNvPr>
@@ -5835,13 +5862,20 @@
           </p:nvPr>
         </p:nvSpPr>
         <p:spPr/>
+        <p:txBody>
+          <a:bodyPr/>
+          <a:lstStyle/>
+          <a:p>
+            <a:endParaRPr lang="en-US"/>
+          </a:p>
+        </p:txBody>
       </p:sp>
       <p:sp>
         <p:nvSpPr>
           <p:cNvPr id="3" name="Espaço Reservado para Imagem 2">
             <a:extLst>
               <a:ext uri="{FF2B5EF4-FFF2-40B4-BE49-F238E27FC236}">
-                <a16:creationId xmlns:a16="http://schemas.microsoft.com/office/drawing/2014/main" id="{E642EA63-16A8-7088-885F-868252E92D90}"/>
+                <a16:creationId xmlns:a16="http://schemas.microsoft.com/office/drawing/2014/main" id="{708E85F6-8917-74E2-8058-2E8BE0F4A5BD}"/>
               </a:ext>
             </a:extLst>
           </p:cNvPr>
@@ -5853,13 +5887,20 @@
           </p:nvPr>
         </p:nvSpPr>
         <p:spPr/>
+        <p:txBody>
+          <a:bodyPr/>
+          <a:lstStyle/>
+          <a:p>
+            <a:endParaRPr lang="en-US"/>
+          </a:p>
+        </p:txBody>
       </p:sp>
       <p:sp>
         <p:nvSpPr>
           <p:cNvPr id="4" name="Espaço Reservado para Imagem 3">
             <a:extLst>
               <a:ext uri="{FF2B5EF4-FFF2-40B4-BE49-F238E27FC236}">
-                <a16:creationId xmlns:a16="http://schemas.microsoft.com/office/drawing/2014/main" id="{C6E97348-842E-5DAF-F140-6A8A22C281A5}"/>
+                <a16:creationId xmlns:a16="http://schemas.microsoft.com/office/drawing/2014/main" id="{C1B52F0E-FA11-3806-EF3B-B23A60183CA0}"/>
               </a:ext>
             </a:extLst>
           </p:cNvPr>
@@ -5871,13 +5912,20 @@
           </p:nvPr>
         </p:nvSpPr>
         <p:spPr/>
+        <p:txBody>
+          <a:bodyPr/>
+          <a:lstStyle/>
+          <a:p>
+            <a:endParaRPr lang="en-US"/>
+          </a:p>
+        </p:txBody>
       </p:sp>
       <p:sp>
         <p:nvSpPr>
           <p:cNvPr id="5" name="Espaço Reservado para Imagem 4">
             <a:extLst>
               <a:ext uri="{FF2B5EF4-FFF2-40B4-BE49-F238E27FC236}">
-                <a16:creationId xmlns:a16="http://schemas.microsoft.com/office/drawing/2014/main" id="{A4EC325A-2107-A3F1-0463-1ADC25DB456B}"/>
+                <a16:creationId xmlns:a16="http://schemas.microsoft.com/office/drawing/2014/main" id="{2536E645-37E7-9933-6D69-2623A9E358EE}"/>
               </a:ext>
             </a:extLst>
           </p:cNvPr>
@@ -5889,13 +5937,20 @@
           </p:nvPr>
         </p:nvSpPr>
         <p:spPr/>
+        <p:txBody>
+          <a:bodyPr/>
+          <a:lstStyle/>
+          <a:p>
+            <a:endParaRPr lang="en-US"/>
+          </a:p>
+        </p:txBody>
       </p:sp>
       <p:sp>
         <p:nvSpPr>
           <p:cNvPr id="6" name="Espaço Reservado para Imagem 5">
             <a:extLst>
               <a:ext uri="{FF2B5EF4-FFF2-40B4-BE49-F238E27FC236}">
-                <a16:creationId xmlns:a16="http://schemas.microsoft.com/office/drawing/2014/main" id="{D346445E-AA41-D237-D030-07DB8B8882A0}"/>
+                <a16:creationId xmlns:a16="http://schemas.microsoft.com/office/drawing/2014/main" id="{F3809F60-349C-D905-BB52-F3B2C4EDDAD5}"/>
               </a:ext>
             </a:extLst>
           </p:cNvPr>
@@ -5907,39 +5962,57 @@
           </p:nvPr>
         </p:nvSpPr>
         <p:spPr/>
-      </p:sp>
-      <p:sp>
-        <p:nvSpPr>
-          <p:cNvPr id="7" name="Espaço Reservado para Imagem 6">
-            <a:extLst>
-              <a:ext uri="{FF2B5EF4-FFF2-40B4-BE49-F238E27FC236}">
-                <a16:creationId xmlns:a16="http://schemas.microsoft.com/office/drawing/2014/main" id="{BB12372A-A26C-ACEA-53A6-44A734D86770}"/>
-              </a:ext>
-            </a:extLst>
-          </p:cNvPr>
-          <p:cNvSpPr>
-            <a:spLocks noGrp="1"/>
-          </p:cNvSpPr>
-          <p:nvPr>
-            <p:ph type="pic" sz="quarter" idx="15"/>
+        <p:txBody>
+          <a:bodyPr/>
+          <a:lstStyle/>
+          <a:p>
+            <a:endParaRPr lang="en-US"/>
+          </a:p>
+        </p:txBody>
+      </p:sp>
+      <p:sp>
+        <p:nvSpPr>
+          <p:cNvPr id="7" name="Espaço Reservado para Texto 6">
+            <a:extLst>
+              <a:ext uri="{FF2B5EF4-FFF2-40B4-BE49-F238E27FC236}">
+                <a16:creationId xmlns:a16="http://schemas.microsoft.com/office/drawing/2014/main" id="{71C8A53A-2E0C-FDB3-50AC-372B52B6A11C}"/>
+              </a:ext>
+            </a:extLst>
+          </p:cNvPr>
+          <p:cNvSpPr>
+            <a:spLocks noGrp="1"/>
+          </p:cNvSpPr>
+          <p:nvPr>
+            <p:ph type="body" sz="quarter" idx="16"/>
           </p:nvPr>
         </p:nvSpPr>
         <p:spPr/>
+        <p:txBody>
+          <a:bodyPr/>
+          <a:lstStyle/>
+          <a:p>
+            <a:r>
+              <a:rPr lang="en-US" dirty="0" err="1"/>
+              <a:t>Variograma</a:t>
+            </a:r>
+            <a:endParaRPr lang="en-US" dirty="0"/>
+          </a:p>
+        </p:txBody>
       </p:sp>
       <p:sp>
         <p:nvSpPr>
           <p:cNvPr id="8" name="Espaço Reservado para Texto 7">
             <a:extLst>
               <a:ext uri="{FF2B5EF4-FFF2-40B4-BE49-F238E27FC236}">
-                <a16:creationId xmlns:a16="http://schemas.microsoft.com/office/drawing/2014/main" id="{F7F09B5B-EDE5-A02F-F236-ADD59C560ED9}"/>
-              </a:ext>
-            </a:extLst>
-          </p:cNvPr>
-          <p:cNvSpPr>
-            <a:spLocks noGrp="1"/>
-          </p:cNvSpPr>
-          <p:nvPr>
-            <p:ph type="body" sz="quarter" idx="16"/>
+                <a16:creationId xmlns:a16="http://schemas.microsoft.com/office/drawing/2014/main" id="{47C7D61F-4B9A-86E0-01F7-5B6CE38D3AF5}"/>
+              </a:ext>
+            </a:extLst>
+          </p:cNvPr>
+          <p:cNvSpPr>
+            <a:spLocks noGrp="1"/>
+          </p:cNvSpPr>
+          <p:nvPr>
+            <p:ph type="body" sz="quarter" idx="17"/>
           </p:nvPr>
         </p:nvSpPr>
         <p:spPr/>
@@ -5949,7 +6022,7 @@
           <a:p>
             <a:r>
               <a:rPr lang="en-US" dirty="0"/>
-              <a:t>Variogram</a:t>
+              <a:t>T1 e T2 </a:t>
             </a:r>
           </a:p>
         </p:txBody>
@@ -5959,15 +6032,15 @@
           <p:cNvPr id="9" name="Espaço Reservado para Texto 8">
             <a:extLst>
               <a:ext uri="{FF2B5EF4-FFF2-40B4-BE49-F238E27FC236}">
-                <a16:creationId xmlns:a16="http://schemas.microsoft.com/office/drawing/2014/main" id="{0B5BA27F-3D79-9C37-F0F9-126DB494E3FC}"/>
-              </a:ext>
-            </a:extLst>
-          </p:cNvPr>
-          <p:cNvSpPr>
-            <a:spLocks noGrp="1"/>
-          </p:cNvSpPr>
-          <p:nvPr>
-            <p:ph type="body" sz="quarter" idx="17"/>
+                <a16:creationId xmlns:a16="http://schemas.microsoft.com/office/drawing/2014/main" id="{21B55EF2-CEB8-00B1-EBBA-18640F62A1B4}"/>
+              </a:ext>
+            </a:extLst>
+          </p:cNvPr>
+          <p:cNvSpPr>
+            <a:spLocks noGrp="1"/>
+          </p:cNvSpPr>
+          <p:nvPr>
+            <p:ph type="body" sz="quarter" idx="18"/>
           </p:nvPr>
         </p:nvSpPr>
         <p:spPr/>
@@ -5976,8 +6049,8 @@
           <a:lstStyle/>
           <a:p>
             <a:r>
-              <a:rPr lang="en-US" sz="1800" dirty="0"/>
-              <a:t>T1 and T2</a:t>
+              <a:rPr lang="en-US" dirty="0"/>
+              <a:t>T1</a:t>
             </a:r>
           </a:p>
         </p:txBody>
@@ -5987,15 +6060,15 @@
           <p:cNvPr id="10" name="Espaço Reservado para Texto 9">
             <a:extLst>
               <a:ext uri="{FF2B5EF4-FFF2-40B4-BE49-F238E27FC236}">
-                <a16:creationId xmlns:a16="http://schemas.microsoft.com/office/drawing/2014/main" id="{800F78C8-2B4F-08F8-7841-4FF3A6996F4E}"/>
-              </a:ext>
-            </a:extLst>
-          </p:cNvPr>
-          <p:cNvSpPr>
-            <a:spLocks noGrp="1"/>
-          </p:cNvSpPr>
-          <p:nvPr>
-            <p:ph type="body" sz="quarter" idx="18"/>
+                <a16:creationId xmlns:a16="http://schemas.microsoft.com/office/drawing/2014/main" id="{814BC4BF-25EB-4541-312D-6B2807738BAD}"/>
+              </a:ext>
+            </a:extLst>
+          </p:cNvPr>
+          <p:cNvSpPr>
+            <a:spLocks noGrp="1"/>
+          </p:cNvSpPr>
+          <p:nvPr>
+            <p:ph type="body" sz="quarter" idx="19"/>
           </p:nvPr>
         </p:nvSpPr>
         <p:spPr/>
@@ -6004,44 +6077,60 @@
           <a:lstStyle/>
           <a:p>
             <a:r>
-              <a:rPr lang="en-US" sz="1800" dirty="0"/>
-              <a:t>T1</a:t>
-            </a:r>
-          </a:p>
-        </p:txBody>
-      </p:sp>
-      <p:sp>
-        <p:nvSpPr>
-          <p:cNvPr id="11" name="Espaço Reservado para Texto 10">
-            <a:extLst>
-              <a:ext uri="{FF2B5EF4-FFF2-40B4-BE49-F238E27FC236}">
-                <a16:creationId xmlns:a16="http://schemas.microsoft.com/office/drawing/2014/main" id="{C3212C82-AE3A-C72A-9653-4186FD37545B}"/>
-              </a:ext>
-            </a:extLst>
-          </p:cNvPr>
-          <p:cNvSpPr>
-            <a:spLocks noGrp="1"/>
-          </p:cNvSpPr>
-          <p:nvPr>
-            <p:ph type="body" sz="quarter" idx="19"/>
-          </p:nvPr>
-        </p:nvSpPr>
-        <p:spPr/>
+              <a:rPr lang="en-US" dirty="0"/>
+              <a:t>T2</a:t>
+            </a:r>
+          </a:p>
+        </p:txBody>
+      </p:sp>
+      <p:sp>
+        <p:nvSpPr>
+          <p:cNvPr id="11" name="Espaço Reservado para Imagem 10">
+            <a:extLst>
+              <a:ext uri="{FF2B5EF4-FFF2-40B4-BE49-F238E27FC236}">
+                <a16:creationId xmlns:a16="http://schemas.microsoft.com/office/drawing/2014/main" id="{39763F2C-1946-5D0E-6A54-61AC0F796BB6}"/>
+              </a:ext>
+            </a:extLst>
+          </p:cNvPr>
+          <p:cNvSpPr>
+            <a:spLocks noGrp="1"/>
+          </p:cNvSpPr>
+          <p:nvPr>
+            <p:ph type="pic" sz="quarter" idx="20"/>
+          </p:nvPr>
+        </p:nvSpPr>
+        <p:spPr>
+          <a:xfrm>
+            <a:off x="8196072" y="3776472"/>
+            <a:ext cx="3803904" cy="2852737"/>
+          </a:xfrm>
+        </p:spPr>
+        <p:style>
+          <a:lnRef idx="1">
+            <a:schemeClr val="accent3"/>
+          </a:lnRef>
+          <a:fillRef idx="2">
+            <a:schemeClr val="accent3"/>
+          </a:fillRef>
+          <a:effectRef idx="1">
+            <a:schemeClr val="accent3"/>
+          </a:effectRef>
+          <a:fontRef idx="minor">
+            <a:schemeClr val="dk1"/>
+          </a:fontRef>
+        </p:style>
         <p:txBody>
           <a:bodyPr/>
           <a:lstStyle/>
           <a:p>
-            <a:r>
-              <a:rPr lang="en-US" sz="1800" dirty="0"/>
-              <a:t>T2</a:t>
-            </a:r>
+            <a:endParaRPr lang="en-US"/>
           </a:p>
         </p:txBody>
       </p:sp>
     </p:spTree>
     <p:extLst>
       <p:ext uri="{BB962C8B-B14F-4D97-AF65-F5344CB8AC3E}">
-        <p14:creationId xmlns:p14="http://schemas.microsoft.com/office/powerpoint/2010/main" val="934474209"/>
+        <p14:creationId xmlns:p14="http://schemas.microsoft.com/office/powerpoint/2010/main" val="1454847197"/>
       </p:ext>
     </p:extLst>
   </p:cSld>
@@ -6085,6 +6174,13 @@
           </p:nvPr>
         </p:nvSpPr>
         <p:spPr/>
+        <p:txBody>
+          <a:bodyPr/>
+          <a:lstStyle/>
+          <a:p>
+            <a:endParaRPr lang="en-US"/>
+          </a:p>
+        </p:txBody>
       </p:sp>
       <p:sp>
         <p:nvSpPr>
@@ -6103,6 +6199,13 @@
           </p:nvPr>
         </p:nvSpPr>
         <p:spPr/>
+        <p:txBody>
+          <a:bodyPr/>
+          <a:lstStyle/>
+          <a:p>
+            <a:endParaRPr lang="en-US"/>
+          </a:p>
+        </p:txBody>
       </p:sp>
       <p:sp>
         <p:nvSpPr>
@@ -6121,6 +6224,13 @@
           </p:nvPr>
         </p:nvSpPr>
         <p:spPr/>
+        <p:txBody>
+          <a:bodyPr/>
+          <a:lstStyle/>
+          <a:p>
+            <a:endParaRPr lang="en-US"/>
+          </a:p>
+        </p:txBody>
       </p:sp>
       <p:sp>
         <p:nvSpPr>
@@ -6139,6 +6249,13 @@
           </p:nvPr>
         </p:nvSpPr>
         <p:spPr/>
+        <p:txBody>
+          <a:bodyPr/>
+          <a:lstStyle/>
+          <a:p>
+            <a:endParaRPr lang="en-US"/>
+          </a:p>
+        </p:txBody>
       </p:sp>
       <p:sp>
         <p:nvSpPr>
@@ -6215,6 +6332,13 @@
           </p:nvPr>
         </p:nvSpPr>
         <p:spPr/>
+        <p:txBody>
+          <a:bodyPr/>
+          <a:lstStyle/>
+          <a:p>
+            <a:endParaRPr lang="en-US"/>
+          </a:p>
+        </p:txBody>
       </p:sp>
       <p:sp>
         <p:nvSpPr>
@@ -6233,6 +6357,13 @@
           </p:nvPr>
         </p:nvSpPr>
         <p:spPr/>
+        <p:txBody>
+          <a:bodyPr/>
+          <a:lstStyle/>
+          <a:p>
+            <a:endParaRPr lang="en-US"/>
+          </a:p>
+        </p:txBody>
       </p:sp>
       <p:sp>
         <p:nvSpPr>
@@ -6251,6 +6382,13 @@
           </p:nvPr>
         </p:nvSpPr>
         <p:spPr/>
+        <p:txBody>
+          <a:bodyPr/>
+          <a:lstStyle/>
+          <a:p>
+            <a:endParaRPr lang="en-US"/>
+          </a:p>
+        </p:txBody>
       </p:sp>
       <p:sp>
         <p:nvSpPr>
@@ -6269,6 +6407,13 @@
           </p:nvPr>
         </p:nvSpPr>
         <p:spPr/>
+        <p:txBody>
+          <a:bodyPr/>
+          <a:lstStyle/>
+          <a:p>
+            <a:endParaRPr lang="en-US"/>
+          </a:p>
+        </p:txBody>
       </p:sp>
       <p:sp>
         <p:nvSpPr>
@@ -6345,6 +6490,13 @@
           </p:nvPr>
         </p:nvSpPr>
         <p:spPr/>
+        <p:txBody>
+          <a:bodyPr/>
+          <a:lstStyle/>
+          <a:p>
+            <a:endParaRPr lang="en-US"/>
+          </a:p>
+        </p:txBody>
       </p:sp>
       <p:sp>
         <p:nvSpPr>
@@ -6363,6 +6515,13 @@
           </p:nvPr>
         </p:nvSpPr>
         <p:spPr/>
+        <p:txBody>
+          <a:bodyPr/>
+          <a:lstStyle/>
+          <a:p>
+            <a:endParaRPr lang="en-US"/>
+          </a:p>
+        </p:txBody>
       </p:sp>
       <p:sp>
         <p:nvSpPr>
@@ -6381,6 +6540,13 @@
           </p:nvPr>
         </p:nvSpPr>
         <p:spPr/>
+        <p:txBody>
+          <a:bodyPr/>
+          <a:lstStyle/>
+          <a:p>
+            <a:endParaRPr lang="en-US"/>
+          </a:p>
+        </p:txBody>
       </p:sp>
     </p:spTree>
     <p:extLst>
